--- a/lectures/Lecture 4.2 - Practical Testing.pptx
+++ b/lectures/Lecture 4.2 - Practical Testing.pptx
@@ -1287,7 +1287,7 @@
             </a:pPr>
             <a:r>
               <a:rPr lang="en-US"/>
-              <a:t>Point at the parameter name with your cursor. pytest looks at the test function's signature, sees `client`, finds a fixture with the same name, runs it, and passes the result in. That's the entire dependency injection mechanism, no magic beyond that.</a:t>
+              <a:t>Point at the parameter name with your cursor. pytest looks at the test function's signature, sees `client`, finds a fixture with the same name, runs it, and passes the result in. That's the whole dependency injection mechanism, and there's nothing else hiding behind it.</a:t>
             </a:r>
             <a:endParaRPr/>
           </a:p>
@@ -1438,7 +1438,7 @@
             </a:pPr>
             <a:r>
               <a:rPr lang="en-US"/>
-              <a:t>Point at the parameter name with your cursor. pytest looks at the test function's signature, sees `client`, finds a fixture with the same name, runs it, and passes the result in. That's the entire dependency injection mechanism, no magic beyond that.</a:t>
+              <a:t>Point at the parameter name with your cursor. pytest looks at the test function's signature, sees `client`, finds a fixture with the same name, runs it, and passes the result in. That's the whole dependency injection mechanism, and there's nothing else hiding behind it.</a:t>
             </a:r>
             <a:endParaRPr/>
           </a:p>
@@ -2998,7 +2998,7 @@
             </a:pPr>
             <a:r>
               <a:rPr lang="en-US"/>
-              <a:t>The pyramid is a rule of thumb, not a law, so don't oversell it. The intuition that actually matters: unit tests are cheap and focused, E2E tests are expensive and brittle, so you want a LOT of the former and only a few of the latter. Get that balance wrong the other way and your test suite becomes the thing that slows the team down, which is its own whole gripe.</a:t>
+              <a:t>The pyramid is a rule of thumb rather than a law, so don't oversell it. What actually matters is that unit tests are cheap and focused while E2E tests are expensive and brittle, so you want a LOT of the first kind and only a handful of the second. Get that balance wrong the other way and your test suite becomes the thing that slows the team down, which is its own whole gripe.</a:t>
             </a:r>
             <a:endParaRPr/>
           </a:p>
@@ -3149,7 +3149,7 @@
             </a:pPr>
             <a:r>
               <a:rPr lang="en-US"/>
-              <a:t>The pyramid is a rule of thumb, not a law, so don't oversell it. The intuition that actually matters: unit tests are cheap and focused, E2E tests are expensive and brittle, so you want a LOT of the former and only a few of the latter. Get that balance wrong the other way and your test suite becomes the thing that slows the team down, which is its own whole gripe.</a:t>
+              <a:t>The pyramid is a rule of thumb rather than a law, so don't oversell it. What actually matters is that unit tests are cheap and focused while E2E tests are expensive and brittle, so you want a LOT of the first kind and only a handful of the second. Get that balance wrong the other way and your test suite becomes the thing that slows the team down, which is its own whole gripe.</a:t>
             </a:r>
             <a:endParaRPr/>
           </a:p>
@@ -3300,7 +3300,7 @@
             </a:pPr>
             <a:r>
               <a:rPr lang="en-US"/>
-              <a:t>The pyramid is a rule of thumb, not a law, so don't oversell it. The intuition that actually matters: unit tests are cheap and focused, E2E tests are expensive and brittle, so you want a LOT of the former and only a few of the latter. Get that balance wrong the other way and your test suite becomes the thing that slows the team down, which is its own whole gripe.</a:t>
+              <a:t>The pyramid is a rule of thumb rather than a law, so don't oversell it. What actually matters is that unit tests are cheap and focused while E2E tests are expensive and brittle, so you want a LOT of the first kind and only a handful of the second. Get that balance wrong the other way and your test suite becomes the thing that slows the team down, which is its own whole gripe.</a:t>
             </a:r>
             <a:endParaRPr/>
           </a:p>
@@ -3652,7 +3652,7 @@
             </a:pPr>
             <a:r>
               <a:rPr lang="en-US"/>
-              <a:t>The 'test has a boundary' framing is the thing to land here - mocks are just the tool for drawing that boundary in a different place than the default. Don't dwell on the abstraction though, students pick it up from the examples on the next couple of slides.</a:t>
+              <a:t>The framing to land is that a test has a boundary, and a mock is just how you draw that boundary somewhere other than where it falls by default. Don't dwell on the abstraction though, they pick it up off the examples on the next couple slides.</a:t>
             </a:r>
             <a:endParaRPr/>
           </a:p>
@@ -3882,7 +3882,7 @@
             </a:pPr>
             <a:r>
               <a:rPr lang="en-US"/>
-              <a:t>The 'test has a boundary' framing is the thing to land here - mocks are just the tool for drawing that boundary in a different place than the default. Don't dwell on the abstraction though, students pick it up from the examples on the next couple of slides.</a:t>
+              <a:t>The framing to land is that a test has a boundary, and a mock is just how you draw that boundary somewhere other than where it falls by default. Don't dwell on the abstraction though, they pick it up off the examples on the next couple slides.</a:t>
             </a:r>
             <a:endParaRPr/>
           </a:p>
@@ -4335,7 +4335,7 @@
             </a:pPr>
             <a:r>
               <a:rPr lang="en-US"/>
-              <a:t>Don't explain WHY these were easy yet. The point of this slide is just to let students feel the gap - 'oh yeah, shipping_cost was fine to test, but my POST /api/messages is...kinda not that' - before we list out the specific dependencies on the next slide. Pause a beat after the last bullet, don't rush.</a:t>
+              <a:t>Don't explain WHY these were easy yet. This slide is just there to let them feel the gap - 'oh yeah, shipping_cost was fine to test, but my POST /api/messages is...kinda not that' - before we list out the specific dependencies on the next slide. Pause a beat after the last bullet, don't rush.</a:t>
             </a:r>
             <a:endParaRPr/>
           </a:p>
@@ -5270,7 +5270,7 @@
             </a:pPr>
             <a:r>
               <a:rPr lang="en-US"/>
-              <a:t>Everything up to this point has been about testing: catching problems BEFORE they ship, in conditions you fully control. That whole arc assumes you can reproduce the problem. In production you often can't, and this next section is the tool for that case. Keep the energy up - this is where a lot of students start to connect the lecture to the real systems they use every day.</a:t>
+              <a:t>Everything up to this point has been testing, meaning catching problems BEFORE they ship in conditions you control completely. All of which quietly assumes you can reproduce the problem in the first place, and in production you often can't, so this next section is the tool for that case. Keep the energy up - this is where a lot of students start to connect the lecture to the real systems they use every day.</a:t>
             </a:r>
             <a:endParaRPr/>
           </a:p>
@@ -5421,7 +5421,7 @@
             </a:pPr>
             <a:r>
               <a:rPr lang="en-US"/>
-              <a:t>Paint the scenario specifically. This is what actually happens on day one of running anything real: somebody reports a weird thing, and your dev-environment reflexes (re-run it, poke at it in the debugger) just don't apply. The point of the slide is to make that gap concrete before we name the solution. Don't reveal the word 'log' until the last bullet - let the three 'you can't' lines sit for a beat first.</a:t>
+              <a:t>Paint the scenario specifically. This is what actually happens on day one of running anything real: somebody reports a weird thing, and your dev-environment reflexes (re-run it, poke at it in the debugger) just don't apply. The slide is there to make that gap concrete before we name any solution. Don't reveal the word 'log' until the last bullet - let the three 'you can't' lines sit for a beat first.</a:t>
             </a:r>
             <a:endParaRPr/>
           </a:p>
@@ -6679,7 +6679,7 @@
             </a:pPr>
             <a:r>
               <a:rPr lang="en-US"/>
-              <a:t>Land both theses together. 'Control' (from the testing arc) and 'observe' (from the logging arc) are two halves of the same idea: dev versus prod. This is the slide to pause on and let click before moving to the wrap-up. If students leave with just this one framing they'll be in good shape for assignment 2 and for the final project deploy later in the term.</a:t>
+              <a:t>Land both theses together. 'Control' came out of the testing arc and 'observe' came out of the logging arc, and they're the same idea split across dev and prod. Pause on this one and let it click before moving to the wrap-up. If students leave with just this one framing they'll be in good shape for assignment 2 and for the final project deploy later in the term.</a:t>
             </a:r>
             <a:endParaRPr/>
           </a:p>
@@ -6710,7 +6710,7 @@
             </a:pPr>
             <a:r>
               <a:rPr lang="en-US"/>
-              <a:t>A thorough test suite won't save you from a prod outage at 2am. Great logs won't save you from shipping a broken release. Skip either, you're blind in one phase.</a:t>
+              <a:t>A thorough test suite isn't gonna save you from a prod outage at 2am, and great logs aren't gonna save you from shipping a broken release in the first place, so skipping either one leaves you blind in one phase or the other.</a:t>
             </a:r>
             <a:endParaRPr/>
           </a:p>
@@ -6876,7 +6876,7 @@
             </a:pPr>
             <a:r>
               <a:rPr lang="en-US"/>
-              <a:t>Land both theses together. 'Control' (from the testing arc) and 'observe' (from the logging arc) are two halves of the same idea: dev versus prod. This is the slide to pause on and let click before moving to the wrap-up. If students leave with just this one framing they'll be in good shape for assignment 2 and for the final project deploy later in the term.</a:t>
+              <a:t>Land both theses together. 'Control' came out of the testing arc and 'observe' came out of the logging arc, and they're the same idea split across dev and prod. Pause on this one and let it click before moving to the wrap-up. If students leave with just this one framing they'll be in good shape for assignment 2 and for the final project deploy later in the term.</a:t>
             </a:r>
             <a:endParaRPr/>
           </a:p>
@@ -6907,7 +6907,7 @@
             </a:pPr>
             <a:r>
               <a:rPr lang="en-US"/>
-              <a:t>A thorough test suite won't save you from a prod outage at 2am. Great logs won't save you from shipping a broken release. Skip either, you're blind in one phase.</a:t>
+              <a:t>A thorough test suite isn't gonna save you from a prod outage at 2am, and great logs aren't gonna save you from shipping a broken release in the first place, so skipping either one leaves you blind in one phase or the other.</a:t>
             </a:r>
             <a:endParaRPr/>
           </a:p>

--- a/lectures/Lecture 4.2 - Practical Testing.pptx
+++ b/lectures/Lecture 4.2 - Practical Testing.pptx
@@ -974,20 +974,9 @@
           </a:bodyPr>
           <a:lstStyle/>
           <a:p>
-            <a:pPr indent="0" lvl="0" marL="0" rtl="0" algn="l">
-              <a:spcBef>
-                <a:spcPts val="0"/>
-              </a:spcBef>
-              <a:spcAft>
-                <a:spcPts val="0"/>
-              </a:spcAft>
-              <a:buNone/>
-            </a:pPr>
-            <a:r>
-              <a:rPr lang="en-US"/>
-              <a:t>Compare this to the naive version on the earlier slide. No subprocess, no time.sleep, no requests library, no port, no finally block...just import, instantiate once, call methods on it. This is pretty much all you need to test your endpoints from here on out.</a:t>
-            </a:r>
-            <a:endParaRPr/>
+            <a:r>
+              <a:t>Compare against the subprocess version.</a:t>
+            </a:r>
           </a:p>
         </p:txBody>
       </p:sp>
@@ -1125,20 +1114,9 @@
           </a:bodyPr>
           <a:lstStyle/>
           <a:p>
-            <a:pPr indent="0" lvl="0" marL="0" rtl="0" algn="l">
-              <a:spcBef>
-                <a:spcPts val="0"/>
-              </a:spcBef>
-              <a:spcAft>
-                <a:spcPts val="0"/>
-              </a:spcAft>
-              <a:buNone/>
-            </a:pPr>
-            <a:r>
-              <a:rPr lang="en-US"/>
-              <a:t>The 'parameter name equals fixture name' rule is the piece most students trip on the first time through. Once they see it twice it clicks...it's just not how anything else in Python works. Worth mentioning that fixtures are kinda the thing that separates an 'I have some tests' project from a real test suite.</a:t>
-            </a:r>
-            <a:endParaRPr/>
+            <a:r>
+              <a:t>Expect confusion on parameter name = fixture name.</a:t>
+            </a:r>
           </a:p>
         </p:txBody>
       </p:sp>
@@ -1276,20 +1254,9 @@
           </a:bodyPr>
           <a:lstStyle/>
           <a:p>
-            <a:pPr indent="0" lvl="0" marL="0" rtl="0" algn="l">
-              <a:spcBef>
-                <a:spcPts val="0"/>
-              </a:spcBef>
-              <a:spcAft>
-                <a:spcPts val="0"/>
-              </a:spcAft>
-              <a:buNone/>
-            </a:pPr>
-            <a:r>
-              <a:rPr lang="en-US"/>
-              <a:t>Point at the parameter name with your cursor. pytest looks at the test function's signature, sees `client`, finds a fixture with the same name, runs it, and passes the result in. That's the whole dependency injection mechanism, and there's nothing else hiding behind it.</a:t>
-            </a:r>
-            <a:endParaRPr/>
+            <a:r>
+              <a:t>Point cursor at the parameter name.</a:t>
+            </a:r>
           </a:p>
         </p:txBody>
       </p:sp>
@@ -1427,20 +1394,9 @@
           </a:bodyPr>
           <a:lstStyle/>
           <a:p>
-            <a:pPr indent="0" lvl="0" marL="0" rtl="0" algn="l">
-              <a:spcBef>
-                <a:spcPts val="0"/>
-              </a:spcBef>
-              <a:spcAft>
-                <a:spcPts val="0"/>
-              </a:spcAft>
-              <a:buNone/>
-            </a:pPr>
-            <a:r>
-              <a:rPr lang="en-US"/>
-              <a:t>Point at the parameter name with your cursor. pytest looks at the test function's signature, sees `client`, finds a fixture with the same name, runs it, and passes the result in. That's the whole dependency injection mechanism, and there's nothing else hiding behind it.</a:t>
-            </a:r>
-            <a:endParaRPr/>
+            <a:r>
+              <a:t>Point cursor at the parameter name.</a:t>
+            </a:r>
           </a:p>
         </p:txBody>
       </p:sp>
@@ -1577,22 +1533,7 @@
             <a:noAutofit/>
           </a:bodyPr>
           <a:lstStyle/>
-          <a:p>
-            <a:pPr indent="0" lvl="0" marL="0" rtl="0" algn="l">
-              <a:spcBef>
-                <a:spcPts val="0"/>
-              </a:spcBef>
-              <a:spcAft>
-                <a:spcPts val="0"/>
-              </a:spcAft>
-              <a:buNone/>
-            </a:pPr>
-            <a:r>
-              <a:rPr lang="en-US"/>
-              <a:t>`yield` splits the fixture into setup (before the yield) and teardown (after the yield), and the teardown runs even if the test blows up. This is kinda how you guarantee test isolation in practice - every test gets a fresh file, nothing leaks between runs.</a:t>
-            </a:r>
-            <a:endParaRPr/>
-          </a:p>
+          <a:p/>
         </p:txBody>
       </p:sp>
       <p:sp>
@@ -1728,22 +1669,7 @@
             <a:noAutofit/>
           </a:bodyPr>
           <a:lstStyle/>
-          <a:p>
-            <a:pPr indent="0" lvl="0" marL="0" rtl="0" algn="l">
-              <a:spcBef>
-                <a:spcPts val="0"/>
-              </a:spcBef>
-              <a:spcAft>
-                <a:spcPts val="0"/>
-              </a:spcAft>
-              <a:buNone/>
-            </a:pPr>
-            <a:r>
-              <a:rPr lang="en-US"/>
-              <a:t>`yield` splits the fixture into setup (before the yield) and teardown (after the yield), and the teardown runs even if the test blows up. This is kinda how you guarantee test isolation in practice - every test gets a fresh file, nothing leaks between runs.</a:t>
-            </a:r>
-            <a:endParaRPr/>
-          </a:p>
+          <a:p/>
         </p:txBody>
       </p:sp>
       <p:sp>
@@ -1880,70 +1806,9 @@
           </a:bodyPr>
           <a:lstStyle/>
           <a:p>
-            <a:pPr indent="0" lvl="0" marL="0" rtl="0" algn="l">
-              <a:spcBef>
-                <a:spcPts val="0"/>
-              </a:spcBef>
-              <a:spcAft>
-                <a:spcPts val="0"/>
-              </a:spcAft>
-              <a:buNone/>
-            </a:pPr>
-            <a:r>
-              <a:rPr lang="en-US"/>
-              <a:t>Every single item on that list turns into a mini-section later in the lecture, so don't rush past it - have students name one or two of the dependencies themselves before you reveal the bullets. 'Control the world around your code' is THE thesis, and it's worth repeating it back at them in different framings throughout the hour. It's kinda the opposite of the fantasy most students have, which is that tests should somehow just run your code as-is and magically know whether it worked.</a:t>
-            </a:r>
-            <a:br>
-              <a:rPr lang="en-US"/>
-            </a:br>
-            <a:endParaRPr/>
-          </a:p>
-          <a:p>
-            <a:pPr indent="0" lvl="0" marL="0" rtl="0" algn="l">
-              <a:spcBef>
-                <a:spcPts val="0"/>
-              </a:spcBef>
-              <a:spcAft>
-                <a:spcPts val="0"/>
-              </a:spcAft>
-              <a:buNone/>
-            </a:pPr>
-            <a:r>
-              <a:rPr lang="en-US"/>
-              <a:t>You don't. The trick of practical testing is one phrase:</a:t>
-            </a:r>
-            <a:endParaRPr/>
-          </a:p>
-          <a:p>
-            <a:pPr indent="0" lvl="0" marL="0" rtl="0" algn="l">
-              <a:spcBef>
-                <a:spcPts val="0"/>
-              </a:spcBef>
-              <a:spcAft>
-                <a:spcPts val="0"/>
-              </a:spcAft>
-              <a:buNone/>
-            </a:pPr>
-            <a:r>
-              <a:rPr lang="en-US"/>
-              <a:t>control the world around your code.</a:t>
-            </a:r>
-            <a:endParaRPr/>
-          </a:p>
-          <a:p>
-            <a:pPr indent="0" lvl="0" marL="0" rtl="0" algn="l">
-              <a:spcBef>
-                <a:spcPts val="0"/>
-              </a:spcBef>
-              <a:spcAft>
-                <a:spcPts val="0"/>
-              </a:spcAft>
-              <a:buNone/>
-            </a:pPr>
-            <a:r>
-              <a:t/>
-            </a:r>
-            <a:endParaRPr/>
+            <a:r>
+              <a:t>Thesis again: control the world around your code.</a:t>
+            </a:r>
           </a:p>
         </p:txBody>
       </p:sp>
@@ -2080,22 +1945,7 @@
             <a:noAutofit/>
           </a:bodyPr>
           <a:lstStyle/>
-          <a:p>
-            <a:pPr indent="0" lvl="0" marL="0" rtl="0" algn="l">
-              <a:spcBef>
-                <a:spcPts val="0"/>
-              </a:spcBef>
-              <a:spcAft>
-                <a:spcPts val="0"/>
-              </a:spcAft>
-              <a:buNone/>
-            </a:pPr>
-            <a:r>
-              <a:rPr lang="en-US"/>
-              <a:t>The in-memory SQLite trick is about the easiest test DB setup in any ecosystem...a fresh database in RAM costs microseconds to create, and it disappears the moment the engine gets garbage-collected. Really convenient for fixtures, and we're about to build one.</a:t>
-            </a:r>
-            <a:endParaRPr/>
-          </a:p>
+          <a:p/>
         </p:txBody>
       </p:sp>
       <p:sp>
@@ -2232,20 +2082,9 @@
           </a:bodyPr>
           <a:lstStyle/>
           <a:p>
-            <a:pPr indent="0" lvl="0" marL="0" rtl="0" algn="l">
-              <a:spcBef>
-                <a:spcPts val="0"/>
-              </a:spcBef>
-              <a:spcAft>
-                <a:spcPts val="0"/>
-              </a:spcAft>
-              <a:buNone/>
-            </a:pPr>
-            <a:r>
-              <a:rPr lang="en-US"/>
-              <a:t>Familiar shape from 2.2, just with SQLAlchemy in front. The engine is the pool manager. init_db creates the table. Run `python db.py` once to set up the file.</a:t>
-            </a:r>
-            <a:endParaRPr/>
+            <a:r>
+              <a:t>Same shape as 2.2; run `python db.py` once.</a:t>
+            </a:r>
           </a:p>
         </p:txBody>
       </p:sp>
@@ -2383,20 +2222,9 @@
           </a:bodyPr>
           <a:lstStyle/>
           <a:p>
-            <a:pPr indent="0" lvl="0" marL="0" rtl="0" algn="l">
-              <a:spcBef>
-                <a:spcPts val="0"/>
-              </a:spcBef>
-              <a:spcAft>
-                <a:spcPts val="0"/>
-              </a:spcAft>
-              <a:buNone/>
-            </a:pPr>
-            <a:r>
-              <a:rPr lang="en-US"/>
-              <a:t>conftest.py is pytest's magic name - any fixture defined in there is automatically available to every test in the directory, no importing required. The save/replace/yield/restore pattern is how you make app.py use the test database for the duration of one test without touching app.py itself. No conditional 'am I running under pytest' branch anywhere in the app, which is really the whole point.</a:t>
-            </a:r>
-            <a:endParaRPr/>
+            <a:r>
+              <a:t>No 'am I under pytest' branch anywhere in app.py.</a:t>
+            </a:r>
           </a:p>
         </p:txBody>
       </p:sp>
@@ -2533,22 +2361,7 @@
             <a:noAutofit/>
           </a:bodyPr>
           <a:lstStyle/>
-          <a:p>
-            <a:pPr indent="0" lvl="0" marL="0" rtl="0" algn="l">
-              <a:spcBef>
-                <a:spcPts val="0"/>
-              </a:spcBef>
-              <a:spcAft>
-                <a:spcPts val="0"/>
-              </a:spcAft>
-              <a:buNone/>
-            </a:pPr>
-            <a:r>
-              <a:rPr lang="en-US"/>
-              <a:t>4.1 taught testing on pure functions, which was kinda the honeymoon. Now reality hits - the code students actually shipped last week is nothing like shipping_cost.</a:t>
-            </a:r>
-            <a:endParaRPr/>
-          </a:p>
+          <a:p/>
         </p:txBody>
       </p:sp>
       <p:sp>
@@ -2685,20 +2498,9 @@
           </a:bodyPr>
           <a:lstStyle/>
           <a:p>
-            <a:pPr indent="0" lvl="0" marL="0" rtl="0" algn="l">
-              <a:spcBef>
-                <a:spcPts val="0"/>
-              </a:spcBef>
-              <a:spcAft>
-                <a:spcPts val="0"/>
-              </a:spcAft>
-              <a:buNone/>
-            </a:pPr>
-            <a:r>
-              <a:rPr lang="en-US"/>
-              <a:t>Walk through the steps in order, slowly - this is the part students tend to rewind. The key property is that your application code is totally unchanged...no conditional branches, no dependency injection into the app, just a temporary attribute swap. Simple, and it really does hold up in practice.</a:t>
-            </a:r>
-            <a:endParaRPr/>
+            <a:r>
+              <a:t>Walk through the steps in order, slowly.</a:t>
+            </a:r>
           </a:p>
         </p:txBody>
       </p:sp>
@@ -2836,20 +2638,9 @@
           </a:bodyPr>
           <a:lstStyle/>
           <a:p>
-            <a:pPr indent="0" lvl="0" marL="0" rtl="0" algn="l">
-              <a:spcBef>
-                <a:spcPts val="0"/>
-              </a:spcBef>
-              <a:spcAft>
-                <a:spcPts val="0"/>
-              </a:spcAft>
-              <a:buNone/>
-            </a:pPr>
-            <a:r>
-              <a:rPr lang="en-US"/>
-              <a:t>Both fixtures at once: `client` gives you the TestClient, `test_db` gives you the fresh in-memory database. Arrange is automatic. Act is one call. Assert checks both the response body AND that the side effect actually landed in storage. Point at how much shorter this is than the naive version from earlier.</a:t>
-            </a:r>
-            <a:endParaRPr/>
+            <a:r>
+              <a:t>Compare length to the subprocess version.</a:t>
+            </a:r>
           </a:p>
         </p:txBody>
       </p:sp>
@@ -2987,20 +2778,9 @@
           </a:bodyPr>
           <a:lstStyle/>
           <a:p>
-            <a:pPr indent="0" lvl="0" marL="0" rtl="0" algn="l">
-              <a:spcBef>
-                <a:spcPts val="0"/>
-              </a:spcBef>
-              <a:spcAft>
-                <a:spcPts val="0"/>
-              </a:spcAft>
-              <a:buNone/>
-            </a:pPr>
-            <a:r>
-              <a:rPr lang="en-US"/>
-              <a:t>The pyramid is a rule of thumb rather than a law, so don't oversell it. What actually matters is that unit tests are cheap and focused while E2E tests are expensive and brittle, so you want a LOT of the first kind and only a handful of the second. Get that balance wrong the other way and your test suite becomes the thing that slows the team down, which is its own whole gripe.</a:t>
-            </a:r>
-            <a:endParaRPr/>
+            <a:r>
+              <a:t>Rule of thumb, don't oversell it.</a:t>
+            </a:r>
           </a:p>
         </p:txBody>
       </p:sp>
@@ -3138,20 +2918,9 @@
           </a:bodyPr>
           <a:lstStyle/>
           <a:p>
-            <a:pPr indent="0" lvl="0" marL="0" rtl="0" algn="l">
-              <a:spcBef>
-                <a:spcPts val="0"/>
-              </a:spcBef>
-              <a:spcAft>
-                <a:spcPts val="0"/>
-              </a:spcAft>
-              <a:buNone/>
-            </a:pPr>
-            <a:r>
-              <a:rPr lang="en-US"/>
-              <a:t>The pyramid is a rule of thumb rather than a law, so don't oversell it. What actually matters is that unit tests are cheap and focused while E2E tests are expensive and brittle, so you want a LOT of the first kind and only a handful of the second. Get that balance wrong the other way and your test suite becomes the thing that slows the team down, which is its own whole gripe.</a:t>
-            </a:r>
-            <a:endParaRPr/>
+            <a:r>
+              <a:t>Rule of thumb, don't oversell it.</a:t>
+            </a:r>
           </a:p>
         </p:txBody>
       </p:sp>
@@ -3289,20 +3058,9 @@
           </a:bodyPr>
           <a:lstStyle/>
           <a:p>
-            <a:pPr indent="0" lvl="0" marL="0" rtl="0" algn="l">
-              <a:spcBef>
-                <a:spcPts val="0"/>
-              </a:spcBef>
-              <a:spcAft>
-                <a:spcPts val="0"/>
-              </a:spcAft>
-              <a:buNone/>
-            </a:pPr>
-            <a:r>
-              <a:rPr lang="en-US"/>
-              <a:t>The pyramid is a rule of thumb rather than a law, so don't oversell it. What actually matters is that unit tests are cheap and focused while E2E tests are expensive and brittle, so you want a LOT of the first kind and only a handful of the second. Get that balance wrong the other way and your test suite becomes the thing that slows the team down, which is its own whole gripe.</a:t>
-            </a:r>
-            <a:endParaRPr/>
+            <a:r>
+              <a:t>Rule of thumb, don't oversell it.</a:t>
+            </a:r>
           </a:p>
         </p:txBody>
       </p:sp>
@@ -3440,70 +3198,9 @@
           </a:bodyPr>
           <a:lstStyle/>
           <a:p>
-            <a:pPr indent="0" lvl="0" marL="0" rtl="0" algn="l">
-              <a:spcBef>
-                <a:spcPts val="0"/>
-              </a:spcBef>
-              <a:spcAft>
-                <a:spcPts val="0"/>
-              </a:spcAft>
-              <a:buNone/>
-            </a:pPr>
-            <a:r>
-              <a:rPr lang="en-US"/>
-              <a:t>Every single item on that list turns into a mini-section later in the lecture, so don't rush past it - have students name one or two of the dependencies themselves before you reveal the bullets. 'Control the world around your code' is THE thesis, and it's worth repeating it back at them in different framings throughout the hour. It's kinda the opposite of the fantasy most students have, which is that tests should somehow just run your code as-is and magically know whether it worked.</a:t>
-            </a:r>
-            <a:br>
-              <a:rPr lang="en-US"/>
-            </a:br>
-            <a:endParaRPr/>
-          </a:p>
-          <a:p>
-            <a:pPr indent="0" lvl="0" marL="0" rtl="0" algn="l">
-              <a:spcBef>
-                <a:spcPts val="0"/>
-              </a:spcBef>
-              <a:spcAft>
-                <a:spcPts val="0"/>
-              </a:spcAft>
-              <a:buNone/>
-            </a:pPr>
-            <a:r>
-              <a:rPr lang="en-US"/>
-              <a:t>You don't. The trick of practical testing is one phrase:</a:t>
-            </a:r>
-            <a:endParaRPr/>
-          </a:p>
-          <a:p>
-            <a:pPr indent="0" lvl="0" marL="0" rtl="0" algn="l">
-              <a:spcBef>
-                <a:spcPts val="0"/>
-              </a:spcBef>
-              <a:spcAft>
-                <a:spcPts val="0"/>
-              </a:spcAft>
-              <a:buNone/>
-            </a:pPr>
-            <a:r>
-              <a:rPr lang="en-US"/>
-              <a:t>control the world around your code.</a:t>
-            </a:r>
-            <a:endParaRPr/>
-          </a:p>
-          <a:p>
-            <a:pPr indent="0" lvl="0" marL="0" rtl="0" algn="l">
-              <a:spcBef>
-                <a:spcPts val="0"/>
-              </a:spcBef>
-              <a:spcAft>
-                <a:spcPts val="0"/>
-              </a:spcAft>
-              <a:buNone/>
-            </a:pPr>
-            <a:r>
-              <a:t/>
-            </a:r>
-            <a:endParaRPr/>
+            <a:r>
+              <a:t>Thesis again: control the world around your code.</a:t>
+            </a:r>
           </a:p>
         </p:txBody>
       </p:sp>
@@ -3641,99 +3338,9 @@
           </a:bodyPr>
           <a:lstStyle/>
           <a:p>
-            <a:pPr indent="0" lvl="0" marL="0" rtl="0" algn="l">
-              <a:spcBef>
-                <a:spcPts val="0"/>
-              </a:spcBef>
-              <a:spcAft>
-                <a:spcPts val="0"/>
-              </a:spcAft>
-              <a:buNone/>
-            </a:pPr>
-            <a:r>
-              <a:rPr lang="en-US"/>
-              <a:t>The framing to land is that a test has a boundary, and a mock is just how you draw that boundary somewhere other than where it falls by default. Don't dwell on the abstraction though, they pick it up off the examples on the next couple slides.</a:t>
-            </a:r>
-            <a:endParaRPr/>
-          </a:p>
-          <a:p>
-            <a:pPr indent="0" lvl="0" marL="0" rtl="0" algn="l">
-              <a:spcBef>
-                <a:spcPts val="0"/>
-              </a:spcBef>
-              <a:spcAft>
-                <a:spcPts val="0"/>
-              </a:spcAft>
-              <a:buNone/>
-            </a:pPr>
-            <a:r>
-              <a:t/>
-            </a:r>
-            <a:endParaRPr/>
-          </a:p>
-          <a:p>
-            <a:pPr indent="0" lvl="0" marL="0" rtl="0" algn="l">
-              <a:spcBef>
-                <a:spcPts val="0"/>
-              </a:spcBef>
-              <a:spcAft>
-                <a:spcPts val="0"/>
-              </a:spcAft>
-              <a:buNone/>
-            </a:pPr>
-            <a:r>
-              <a:rPr lang="en-US"/>
-              <a:t>What are some other dependencies that might not cooperate?</a:t>
-            </a:r>
-            <a:endParaRPr/>
-          </a:p>
-          <a:p>
-            <a:pPr indent="0" lvl="0" marL="0" rtl="0" algn="l">
-              <a:spcBef>
-                <a:spcPts val="0"/>
-              </a:spcBef>
-              <a:spcAft>
-                <a:spcPts val="0"/>
-              </a:spcAft>
-              <a:buNone/>
-            </a:pPr>
-            <a:r>
-              <a:rPr lang="en-US"/>
-              <a:t> External APIs (Stripe, SendGrid - you don’t want to hit these in tests!)</a:t>
-            </a:r>
-            <a:endParaRPr/>
-          </a:p>
-          <a:p>
-            <a:pPr indent="0" lvl="0" marL="0" rtl="0" algn="l">
-              <a:spcBef>
-                <a:spcPts val="0"/>
-              </a:spcBef>
-              <a:spcAft>
-                <a:spcPts val="0"/>
-              </a:spcAft>
-              <a:buNone/>
-            </a:pPr>
-            <a:r>
-              <a:rPr lang="en-US"/>
-              <a:t>  Random numbers (nondeterministic by design)</a:t>
-            </a:r>
-            <a:endParaRPr/>
-          </a:p>
-          <a:p>
-            <a:pPr indent="0" lvl="0" marL="0" rtl="0" algn="l">
-              <a:spcBef>
-                <a:spcPts val="0"/>
-              </a:spcBef>
-              <a:spcAft>
-                <a:spcPts val="0"/>
-              </a:spcAft>
-              <a:buNone/>
-            </a:pPr>
-            <a:r>
-              <a:rPr lang="en-US"/>
-              <a:t>  Email senders, payment processors, SMS gateways, ...</a:t>
-            </a:r>
-            <a:endParaRPr/>
+            <a:r>
+              <a:t>Ask for other uncooperative dependencies: external APIs, randomness, email/payments/SMS.</a:t>
+            </a:r>
           </a:p>
         </p:txBody>
       </p:sp>
@@ -3871,20 +3478,9 @@
           </a:bodyPr>
           <a:lstStyle/>
           <a:p>
-            <a:pPr indent="0" lvl="0" marL="0" rtl="0" algn="l">
-              <a:spcBef>
-                <a:spcPts val="0"/>
-              </a:spcBef>
-              <a:spcAft>
-                <a:spcPts val="0"/>
-              </a:spcAft>
-              <a:buNone/>
-            </a:pPr>
-            <a:r>
-              <a:rPr lang="en-US"/>
-              <a:t>The framing to land is that a test has a boundary, and a mock is just how you draw that boundary somewhere other than where it falls by default. Don't dwell on the abstraction though, they pick it up off the examples on the next couple slides.</a:t>
-            </a:r>
-            <a:endParaRPr/>
+            <a:r>
+              <a:t>Ask for other uncooperative dependencies: external APIs, randomness, email/payments/SMS.</a:t>
+            </a:r>
           </a:p>
         </p:txBody>
       </p:sp>
@@ -4022,20 +3618,9 @@
           </a:bodyPr>
           <a:lstStyle/>
           <a:p>
-            <a:pPr indent="0" lvl="0" marL="0" rtl="0" algn="l">
-              <a:spcBef>
-                <a:spcPts val="0"/>
-              </a:spcBef>
-              <a:spcAft>
-                <a:spcPts val="0"/>
-              </a:spcAft>
-              <a:buNone/>
-            </a:pPr>
-            <a:r>
-              <a:rPr lang="en-US"/>
-              <a:t>`patch` temporarily replaces a name inside another module. Here we're saying 'inside app.py, replace the datetime name with this fake for the duration of the with block.' The fake returns our frozen value whenever .utcnow() is called...and once the with block exits, real datetime is back in place. Determinism restored.</a:t>
-            </a:r>
-            <a:endParaRPr/>
+            <a:r>
+              <a:t>Patches the name inside app.py, not datetime itself.</a:t>
+            </a:r>
           </a:p>
         </p:txBody>
       </p:sp>
@@ -4173,20 +3758,9 @@
           </a:bodyPr>
           <a:lstStyle/>
           <a:p>
-            <a:pPr indent="0" lvl="0" marL="0" rtl="0" algn="l">
-              <a:spcBef>
-                <a:spcPts val="0"/>
-              </a:spcBef>
-              <a:spcAft>
-                <a:spcPts val="0"/>
-              </a:spcAft>
-              <a:buNone/>
-            </a:pPr>
-            <a:r>
-              <a:rPr lang="en-US"/>
-              <a:t>`patch` temporarily replaces a name inside another module. Here we're saying 'inside app.py, replace the datetime name with this fake for the duration of the with block.' The fake returns our frozen value whenever .utcnow() is called...and once the with block exits, real datetime is back in place. Determinism restored.</a:t>
-            </a:r>
-            <a:endParaRPr/>
+            <a:r>
+              <a:t>Patches the name inside app.py, not datetime itself.</a:t>
+            </a:r>
           </a:p>
         </p:txBody>
       </p:sp>
@@ -4324,20 +3898,9 @@
           </a:bodyPr>
           <a:lstStyle/>
           <a:p>
-            <a:pPr indent="0" lvl="0" marL="0" rtl="0" algn="l">
-              <a:spcBef>
-                <a:spcPts val="0"/>
-              </a:spcBef>
-              <a:spcAft>
-                <a:spcPts val="0"/>
-              </a:spcAft>
-              <a:buNone/>
-            </a:pPr>
-            <a:r>
-              <a:rPr lang="en-US"/>
-              <a:t>Don't explain WHY these were easy yet. This slide is just there to let them feel the gap - 'oh yeah, shipping_cost was fine to test, but my POST /api/messages is...kinda not that' - before we list out the specific dependencies on the next slide. Pause a beat after the last bullet, don't rush.</a:t>
-            </a:r>
-            <a:endParaRPr/>
+            <a:r>
+              <a:t>Don't explain why yet; pause after the last bullet.</a:t>
+            </a:r>
           </a:p>
         </p:txBody>
       </p:sp>
@@ -4475,20 +4038,9 @@
           </a:bodyPr>
           <a:lstStyle/>
           <a:p>
-            <a:pPr indent="0" lvl="0" marL="0" rtl="0" algn="l">
-              <a:spcBef>
-                <a:spcPts val="0"/>
-              </a:spcBef>
-              <a:spcAft>
-                <a:spcPts val="0"/>
-              </a:spcAft>
-              <a:buNone/>
-            </a:pPr>
-            <a:r>
-              <a:rPr lang="en-US"/>
-              <a:t>Mocking feels like progress but it can quietly hide real bugs. A test with ten mocks and no real dependencies is mostly testing that your mocks match your expectations about your mocks...it's not really testing your code at all. Default to real, treat mocks as the exception. Honestly this is my single biggest gripe with most student test suites - push your coding agent on this one if it over-mocks on assignment 2, because it absolutely will if you don't.</a:t>
-            </a:r>
-            <a:endParaRPr/>
+            <a:r>
+              <a:t>Agents over-mock on A2; have them check for it.</a:t>
+            </a:r>
           </a:p>
         </p:txBody>
       </p:sp>
@@ -4626,20 +4178,9 @@
           </a:bodyPr>
           <a:lstStyle/>
           <a:p>
-            <a:pPr indent="0" lvl="0" marL="0" rtl="0" algn="l">
-              <a:spcBef>
-                <a:spcPts val="0"/>
-              </a:spcBef>
-              <a:spcAft>
-                <a:spcPts val="0"/>
-              </a:spcAft>
-              <a:buNone/>
-            </a:pPr>
-            <a:r>
-              <a:rPr lang="en-US"/>
-              <a:t>Mocking feels like progress but it can quietly hide real bugs. A test with ten mocks and no real dependencies is mostly testing that your mocks match your expectations about your mocks...it's not really testing your code at all. Default to real, treat mocks as the exception. Honestly this is my single biggest gripe with most student test suites - push your coding agent on this one if it over-mocks on assignment 2, because it absolutely will if you don't.</a:t>
-            </a:r>
-            <a:endParaRPr/>
+            <a:r>
+              <a:t>Agents over-mock on A2; have them check for it.</a:t>
+            </a:r>
           </a:p>
         </p:txBody>
       </p:sp>
@@ -4777,351 +4318,9 @@
           </a:bodyPr>
           <a:lstStyle/>
           <a:p>
-            <a:pPr indent="0" lvl="0" marL="0" rtl="0" algn="l">
-              <a:spcBef>
-                <a:spcPts val="0"/>
-              </a:spcBef>
-              <a:spcAft>
-                <a:spcPts val="0"/>
-              </a:spcAft>
-              <a:buNone/>
-            </a:pPr>
-            <a:r>
-              <a:rPr lang="en-US"/>
-              <a:t>This exercise pulls together basically everything in the lecture: TestClient for HTTP, test_db for isolation, fixtures for dependency injection, AAA structure in the body of the test. Students who can write this from scratch are ready for the testing requirements in assignment 3.</a:t>
-            </a:r>
-            <a:endParaRPr/>
-          </a:p>
-          <a:p>
-            <a:pPr indent="0" lvl="0" marL="0" rtl="0" algn="l">
-              <a:spcBef>
-                <a:spcPts val="0"/>
-              </a:spcBef>
-              <a:spcAft>
-                <a:spcPts val="0"/>
-              </a:spcAft>
-              <a:buNone/>
-            </a:pPr>
-            <a:r>
-              <a:t/>
-            </a:r>
-            <a:endParaRPr/>
-          </a:p>
-          <a:p>
-            <a:pPr indent="0" lvl="0" marL="0" rtl="0" algn="l">
-              <a:spcBef>
-                <a:spcPts val="0"/>
-              </a:spcBef>
-              <a:spcAft>
-                <a:spcPts val="0"/>
-              </a:spcAft>
-              <a:buNone/>
-            </a:pPr>
-            <a:r>
-              <a:rPr lang="en-US"/>
-              <a:t>def test_post_creates_new_message(client, test_db):</a:t>
-            </a:r>
-            <a:endParaRPr/>
-          </a:p>
-          <a:p>
-            <a:pPr indent="0" lvl="0" marL="0" rtl="0" algn="l">
-              <a:spcBef>
-                <a:spcPts val="0"/>
-              </a:spcBef>
-              <a:spcAft>
-                <a:spcPts val="0"/>
-              </a:spcAft>
-              <a:buNone/>
-            </a:pPr>
-            <a:r>
-              <a:rPr lang="en-US"/>
-              <a:t>    # Arrange</a:t>
-            </a:r>
-            <a:endParaRPr/>
-          </a:p>
-          <a:p>
-            <a:pPr indent="0" lvl="0" marL="0" rtl="0" algn="l">
-              <a:spcBef>
-                <a:spcPts val="0"/>
-              </a:spcBef>
-              <a:spcAft>
-                <a:spcPts val="0"/>
-              </a:spcAft>
-              <a:buNone/>
-            </a:pPr>
-            <a:r>
-              <a:rPr lang="en-US"/>
-              <a:t>    assert client.get("/api/messages").json() == []</a:t>
-            </a:r>
-            <a:endParaRPr/>
-          </a:p>
-          <a:p>
-            <a:pPr indent="0" lvl="0" marL="0" rtl="0" algn="l">
-              <a:spcBef>
-                <a:spcPts val="0"/>
-              </a:spcBef>
-              <a:spcAft>
-                <a:spcPts val="0"/>
-              </a:spcAft>
-              <a:buNone/>
-            </a:pPr>
-            <a:r>
-              <a:t/>
-            </a:r>
-            <a:endParaRPr/>
-          </a:p>
-          <a:p>
-            <a:pPr indent="0" lvl="0" marL="0" rtl="0" algn="l">
-              <a:spcBef>
-                <a:spcPts val="0"/>
-              </a:spcBef>
-              <a:spcAft>
-                <a:spcPts val="0"/>
-              </a:spcAft>
-              <a:buNone/>
-            </a:pPr>
-            <a:r>
-              <a:rPr lang="en-US"/>
-              <a:t>    # Act</a:t>
-            </a:r>
-            <a:endParaRPr/>
-          </a:p>
-          <a:p>
-            <a:pPr indent="0" lvl="0" marL="0" rtl="0" algn="l">
-              <a:spcBef>
-                <a:spcPts val="0"/>
-              </a:spcBef>
-              <a:spcAft>
-                <a:spcPts val="0"/>
-              </a:spcAft>
-              <a:buNone/>
-            </a:pPr>
-            <a:r>
-              <a:rPr lang="en-US"/>
-              <a:t>    r = client.post("/api/messages",</a:t>
-            </a:r>
-            <a:endParaRPr/>
-          </a:p>
-          <a:p>
-            <a:pPr indent="0" lvl="0" marL="0" rtl="0" algn="l">
-              <a:spcBef>
-                <a:spcPts val="0"/>
-              </a:spcBef>
-              <a:spcAft>
-                <a:spcPts val="0"/>
-              </a:spcAft>
-              <a:buNone/>
-            </a:pPr>
-            <a:r>
-              <a:rPr lang="en-US"/>
-              <a:t>                    json={"author": "alice", "text": "first!"})</a:t>
-            </a:r>
-            <a:endParaRPr/>
-          </a:p>
-          <a:p>
-            <a:pPr indent="0" lvl="0" marL="0" rtl="0" algn="l">
-              <a:spcBef>
-                <a:spcPts val="0"/>
-              </a:spcBef>
-              <a:spcAft>
-                <a:spcPts val="0"/>
-              </a:spcAft>
-              <a:buNone/>
-            </a:pPr>
-            <a:r>
-              <a:t/>
-            </a:r>
-            <a:endParaRPr/>
-          </a:p>
-          <a:p>
-            <a:pPr indent="0" lvl="0" marL="0" rtl="0" algn="l">
-              <a:spcBef>
-                <a:spcPts val="0"/>
-              </a:spcBef>
-              <a:spcAft>
-                <a:spcPts val="0"/>
-              </a:spcAft>
-              <a:buNone/>
-            </a:pPr>
-            <a:r>
-              <a:rPr lang="en-US"/>
-              <a:t>    # Assert: response</a:t>
-            </a:r>
-            <a:endParaRPr/>
-          </a:p>
-          <a:p>
-            <a:pPr indent="0" lvl="0" marL="0" rtl="0" algn="l">
-              <a:spcBef>
-                <a:spcPts val="0"/>
-              </a:spcBef>
-              <a:spcAft>
-                <a:spcPts val="0"/>
-              </a:spcAft>
-              <a:buNone/>
-            </a:pPr>
-            <a:r>
-              <a:rPr lang="en-US"/>
-              <a:t>    assert r.status_code == 201</a:t>
-            </a:r>
-            <a:endParaRPr/>
-          </a:p>
-          <a:p>
-            <a:pPr indent="0" lvl="0" marL="0" rtl="0" algn="l">
-              <a:spcBef>
-                <a:spcPts val="0"/>
-              </a:spcBef>
-              <a:spcAft>
-                <a:spcPts val="0"/>
-              </a:spcAft>
-              <a:buNone/>
-            </a:pPr>
-            <a:r>
-              <a:rPr lang="en-US"/>
-              <a:t>    body = r.json()</a:t>
-            </a:r>
-            <a:endParaRPr/>
-          </a:p>
-          <a:p>
-            <a:pPr indent="0" lvl="0" marL="0" rtl="0" algn="l">
-              <a:spcBef>
-                <a:spcPts val="0"/>
-              </a:spcBef>
-              <a:spcAft>
-                <a:spcPts val="0"/>
-              </a:spcAft>
-              <a:buNone/>
-            </a:pPr>
-            <a:r>
-              <a:rPr lang="en-US"/>
-              <a:t>    assert body["author"] == "alice"</a:t>
-            </a:r>
-            <a:endParaRPr/>
-          </a:p>
-          <a:p>
-            <a:pPr indent="0" lvl="0" marL="0" rtl="0" algn="l">
-              <a:spcBef>
-                <a:spcPts val="0"/>
-              </a:spcBef>
-              <a:spcAft>
-                <a:spcPts val="0"/>
-              </a:spcAft>
-              <a:buNone/>
-            </a:pPr>
-            <a:r>
-              <a:rPr lang="en-US"/>
-              <a:t>    assert body["text"] == "first!"</a:t>
-            </a:r>
-            <a:endParaRPr/>
-          </a:p>
-          <a:p>
-            <a:pPr indent="0" lvl="0" marL="0" rtl="0" algn="l">
-              <a:spcBef>
-                <a:spcPts val="0"/>
-              </a:spcBef>
-              <a:spcAft>
-                <a:spcPts val="0"/>
-              </a:spcAft>
-              <a:buNone/>
-            </a:pPr>
-            <a:r>
-              <a:rPr lang="en-US"/>
-              <a:t>    assert "id" in body and "timestamp" in body</a:t>
-            </a:r>
-            <a:endParaRPr/>
-          </a:p>
-          <a:p>
-            <a:pPr indent="0" lvl="0" marL="0" rtl="0" algn="l">
-              <a:spcBef>
-                <a:spcPts val="0"/>
-              </a:spcBef>
-              <a:spcAft>
-                <a:spcPts val="0"/>
-              </a:spcAft>
-              <a:buNone/>
-            </a:pPr>
-            <a:r>
-              <a:t/>
-            </a:r>
-            <a:endParaRPr/>
-          </a:p>
-          <a:p>
-            <a:pPr indent="0" lvl="0" marL="0" rtl="0" algn="l">
-              <a:spcBef>
-                <a:spcPts val="0"/>
-              </a:spcBef>
-              <a:spcAft>
-                <a:spcPts val="0"/>
-              </a:spcAft>
-              <a:buNone/>
-            </a:pPr>
-            <a:r>
-              <a:rPr lang="en-US"/>
-              <a:t>    # Assert: persisted state</a:t>
-            </a:r>
-            <a:endParaRPr/>
-          </a:p>
-          <a:p>
-            <a:pPr indent="0" lvl="0" marL="0" rtl="0" algn="l">
-              <a:spcBef>
-                <a:spcPts val="0"/>
-              </a:spcBef>
-              <a:spcAft>
-                <a:spcPts val="0"/>
-              </a:spcAft>
-              <a:buNone/>
-            </a:pPr>
-            <a:r>
-              <a:rPr lang="en-US"/>
-              <a:t>    all_msgs = client.get("/api/messages").json()</a:t>
-            </a:r>
-            <a:endParaRPr/>
-          </a:p>
-          <a:p>
-            <a:pPr indent="0" lvl="0" marL="0" rtl="0" algn="l">
-              <a:spcBef>
-                <a:spcPts val="0"/>
-              </a:spcBef>
-              <a:spcAft>
-                <a:spcPts val="0"/>
-              </a:spcAft>
-              <a:buNone/>
-            </a:pPr>
-            <a:r>
-              <a:rPr lang="en-US"/>
-              <a:t>    assert len(all_msgs) == 1</a:t>
-            </a:r>
-            <a:endParaRPr/>
-          </a:p>
-          <a:p>
-            <a:pPr indent="0" lvl="0" marL="0" rtl="0" algn="l">
-              <a:spcBef>
-                <a:spcPts val="0"/>
-              </a:spcBef>
-              <a:spcAft>
-                <a:spcPts val="0"/>
-              </a:spcAft>
-              <a:buNone/>
-            </a:pPr>
-            <a:r>
-              <a:rPr lang="en-US"/>
-              <a:t>    assert all_msgs[0]["id"] == body["id"]</a:t>
-            </a:r>
-            <a:endParaRPr/>
-          </a:p>
-          <a:p>
-            <a:pPr indent="0" lvl="0" marL="0" rtl="0" algn="l">
-              <a:spcBef>
-                <a:spcPts val="0"/>
-              </a:spcBef>
-              <a:spcAft>
-                <a:spcPts val="0"/>
-              </a:spcAft>
-              <a:buNone/>
-            </a:pPr>
-            <a:r>
-              <a:t/>
-            </a:r>
-            <a:endParaRPr/>
+            <a:r>
+              <a:t>Answers: [], author/text json, 201, "alice", "first!", 1, body["id"].</a:t>
+            </a:r>
           </a:p>
         </p:txBody>
       </p:sp>
@@ -5258,22 +4457,7 @@
             <a:noAutofit/>
           </a:bodyPr>
           <a:lstStyle/>
-          <a:p>
-            <a:pPr indent="0" lvl="0" marL="0" rtl="0" algn="l">
-              <a:spcBef>
-                <a:spcPts val="0"/>
-              </a:spcBef>
-              <a:spcAft>
-                <a:spcPts val="0"/>
-              </a:spcAft>
-              <a:buNone/>
-            </a:pPr>
-            <a:r>
-              <a:rPr lang="en-US"/>
-              <a:t>Everything up to this point has been testing, meaning catching problems BEFORE they ship in conditions you control completely. All of which quietly assumes you can reproduce the problem in the first place, and in production you often can't, so this next section is the tool for that case. Keep the energy up - this is where a lot of students start to connect the lecture to the real systems they use every day.</a:t>
-            </a:r>
-            <a:endParaRPr/>
-          </a:p>
+          <a:p/>
         </p:txBody>
       </p:sp>
       <p:sp>
@@ -5410,20 +4594,9 @@
           </a:bodyPr>
           <a:lstStyle/>
           <a:p>
-            <a:pPr indent="0" lvl="0" marL="0" rtl="0" algn="l">
-              <a:spcBef>
-                <a:spcPts val="0"/>
-              </a:spcBef>
-              <a:spcAft>
-                <a:spcPts val="0"/>
-              </a:spcAft>
-              <a:buNone/>
-            </a:pPr>
-            <a:r>
-              <a:rPr lang="en-US"/>
-              <a:t>Paint the scenario specifically. This is what actually happens on day one of running anything real: somebody reports a weird thing, and your dev-environment reflexes (re-run it, poke at it in the debugger) just don't apply. The slide is there to make that gap concrete before we name any solution. Don't reveal the word 'log' until the last bullet - let the three 'you can't' lines sit for a beat first.</a:t>
-            </a:r>
-            <a:endParaRPr/>
+            <a:r>
+              <a:t>Don't say 'log' until the last bullet; pause after the three can'ts.</a:t>
+            </a:r>
           </a:p>
         </p:txBody>
       </p:sp>
@@ -5561,20 +4734,9 @@
           </a:bodyPr>
           <a:lstStyle/>
           <a:p>
-            <a:pPr indent="0" lvl="0" marL="0" rtl="0" algn="l">
-              <a:spcBef>
-                <a:spcPts val="0"/>
-              </a:spcBef>
-              <a:spcAft>
-                <a:spcPts val="0"/>
-              </a:spcAft>
-              <a:buNone/>
-            </a:pPr>
-            <a:r>
-              <a:rPr lang="en-US"/>
-              <a:t>Don't trash prints too hard - they're fine for local dev and every experienced engineer still uses them. The argument is narrower: in production, where you're reading a thousand lines across many requests, prints stop being enough. Logging is really just print with the metadata you'd end up adding by hand anyway, pre-wired.</a:t>
-            </a:r>
-            <a:endParaRPr/>
+            <a:r>
+              <a:t>Prints are fine in local dev; the argument is prod only.</a:t>
+            </a:r>
           </a:p>
         </p:txBody>
       </p:sp>
@@ -5712,20 +4874,9 @@
           </a:bodyPr>
           <a:lstStyle/>
           <a:p>
-            <a:pPr indent="0" lvl="0" marL="0" rtl="0" algn="l">
-              <a:spcBef>
-                <a:spcPts val="0"/>
-              </a:spcBef>
-              <a:spcAft>
-                <a:spcPts val="0"/>
-              </a:spcAft>
-              <a:buNone/>
-            </a:pPr>
-            <a:r>
-              <a:rPr lang="en-US"/>
-              <a:t>One gotcha y'all will hit the first time: if nothing prints, you forgot the `logging.basicConfig(level=logging.INFO, format=...)` call at startup. Without it the root logger defaults to WARNING and INFO logs are silently dropped. Do it once at the top of app.py (or wherever your entrypoint is) and you're set. Also: use `%s`-style placeholders, not f-strings. The logging library only formats the string if the log actually fires, which matters if you ever crank DEBUG on in a hot path.</a:t>
-            </a:r>
-            <a:endParaRPr/>
+            <a:r>
+              <a:t>Gotcha: no output means missing basicConfig (root defaults WARNING). Use %s, not f-strings.</a:t>
+            </a:r>
           </a:p>
         </p:txBody>
       </p:sp>
@@ -5863,20 +5014,9 @@
           </a:bodyPr>
           <a:lstStyle/>
           <a:p>
-            <a:pPr indent="0" lvl="0" marL="0" rtl="0" algn="l">
-              <a:spcBef>
-                <a:spcPts val="0"/>
-              </a:spcBef>
-              <a:spcAft>
-                <a:spcPts val="0"/>
-              </a:spcAft>
-              <a:buNone/>
-            </a:pPr>
-            <a:r>
-              <a:rPr lang="en-US"/>
-              <a:t>The single most common mistake junior devs make is leveling everything at INFO. Everything feels informative when you're writing it. Then in prod you have 50M lines a day, the pager never goes off because nothing's at ERROR, and you find out about outages from Twitter. Levels are a conversation between you and your future self at 2am: 'what would I want to be woken up for?' That's ERROR or CRITICAL. Everything else is lower.</a:t>
-            </a:r>
-            <a:endParaRPr/>
+            <a:r>
+              <a:t>Failure mode: everything at INFO. Ask: what would wake me at 2am?</a:t>
+            </a:r>
           </a:p>
         </p:txBody>
       </p:sp>
@@ -6014,20 +5154,9 @@
           </a:bodyPr>
           <a:lstStyle/>
           <a:p>
-            <a:pPr indent="0" lvl="0" marL="0" rtl="0" algn="l">
-              <a:spcBef>
-                <a:spcPts val="0"/>
-              </a:spcBef>
-              <a:spcAft>
-                <a:spcPts val="0"/>
-              </a:spcAft>
-              <a:buNone/>
-            </a:pPr>
-            <a:r>
-              <a:rPr lang="en-US"/>
-              <a:t>The single most common mistake junior devs make is leveling everything at INFO. Everything feels informative when you're writing it. Then in prod you have 50M lines a day, the pager never goes off because nothing's at ERROR, and you find out about outages from Twitter. Levels are a conversation between you and your future self at 2am: 'what would I want to be woken up for?' That's ERROR or CRITICAL. Everything else is lower.</a:t>
-            </a:r>
-            <a:endParaRPr/>
+            <a:r>
+              <a:t>Failure mode: everything at INFO. Ask: what would wake me at 2am?</a:t>
+            </a:r>
           </a:p>
         </p:txBody>
       </p:sp>
@@ -6165,20 +5294,9 @@
           </a:bodyPr>
           <a:lstStyle/>
           <a:p>
-            <a:pPr indent="0" lvl="0" marL="0" rtl="0" algn="l">
-              <a:spcBef>
-                <a:spcPts val="0"/>
-              </a:spcBef>
-              <a:spcAft>
-                <a:spcPts val="0"/>
-              </a:spcAft>
-              <a:buNone/>
-            </a:pPr>
-            <a:r>
-              <a:rPr lang="en-US"/>
-              <a:t>Give a real 3 minutes, don't cut it short. Cold-call a few pairs and put their answers on the board. What they'll (and should) say: 'received POST to /api/messages with body X at timestamp T', 'wrote row id=N to the DB', 'GET /api/messages returned N rows', 'any errors between 1:58 and 2:02.' Good framing coming out of it: every one of these is a log line that turns 'dunno' into 'here's the chain of events.' Bridge straight into the next slide - it's really the general version of what they just said.</a:t>
-            </a:r>
-            <a:endParaRPr/>
+            <a:r>
+              <a:t>3 min, cold-call pairs, board. Expect: POST received, row written, GET count, errors near 2pm.</a:t>
+            </a:r>
           </a:p>
         </p:txBody>
       </p:sp>
@@ -6316,70 +5434,9 @@
           </a:bodyPr>
           <a:lstStyle/>
           <a:p>
-            <a:pPr indent="0" lvl="0" marL="0" rtl="0" algn="l">
-              <a:spcBef>
-                <a:spcPts val="0"/>
-              </a:spcBef>
-              <a:spcAft>
-                <a:spcPts val="0"/>
-              </a:spcAft>
-              <a:buNone/>
-            </a:pPr>
-            <a:r>
-              <a:rPr lang="en-US"/>
-              <a:t>Every single item on that list turns into a mini-section later in the lecture, so don't rush past it - have students name one or two of the dependencies themselves before you reveal the bullets. 'Control the world around your code' is THE thesis, and it's worth repeating it back at them in different framings throughout the hour. It's kinda the opposite of the fantasy most students have, which is that tests should somehow just run your code as-is and magically know whether it worked.</a:t>
-            </a:r>
-            <a:br>
-              <a:rPr lang="en-US"/>
-            </a:br>
-            <a:endParaRPr/>
-          </a:p>
-          <a:p>
-            <a:pPr indent="0" lvl="0" marL="0" rtl="0" algn="l">
-              <a:spcBef>
-                <a:spcPts val="0"/>
-              </a:spcBef>
-              <a:spcAft>
-                <a:spcPts val="0"/>
-              </a:spcAft>
-              <a:buNone/>
-            </a:pPr>
-            <a:r>
-              <a:rPr lang="en-US"/>
-              <a:t>You don't. The trick of practical testing is one phrase:</a:t>
-            </a:r>
-            <a:endParaRPr/>
-          </a:p>
-          <a:p>
-            <a:pPr indent="0" lvl="0" marL="0" rtl="0" algn="l">
-              <a:spcBef>
-                <a:spcPts val="0"/>
-              </a:spcBef>
-              <a:spcAft>
-                <a:spcPts val="0"/>
-              </a:spcAft>
-              <a:buNone/>
-            </a:pPr>
-            <a:r>
-              <a:rPr lang="en-US"/>
-              <a:t>control the world around your code.</a:t>
-            </a:r>
-            <a:endParaRPr/>
-          </a:p>
-          <a:p>
-            <a:pPr indent="0" lvl="0" marL="0" rtl="0" algn="l">
-              <a:spcBef>
-                <a:spcPts val="0"/>
-              </a:spcBef>
-              <a:spcAft>
-                <a:spcPts val="0"/>
-              </a:spcAft>
-              <a:buNone/>
-            </a:pPr>
-            <a:r>
-              <a:t/>
-            </a:r>
-            <a:endParaRPr/>
+            <a:r>
+              <a:t>Ask for dependencies before revealing bullets. Thesis: control the world around your code.</a:t>
+            </a:r>
           </a:p>
         </p:txBody>
       </p:sp>
@@ -6517,20 +5574,9 @@
           </a:bodyPr>
           <a:lstStyle/>
           <a:p>
-            <a:pPr indent="0" lvl="0" marL="0" rtl="0" algn="l">
-              <a:spcBef>
-                <a:spcPts val="0"/>
-              </a:spcBef>
-              <a:spcAft>
-                <a:spcPts val="0"/>
-              </a:spcAft>
-              <a:buNone/>
-            </a:pPr>
-            <a:r>
-              <a:rPr lang="en-US"/>
-              <a:t>The 'leaked tomorrow' test is really the one that matters - log aggregators are databases, and they get breached just like any other database. A lot of the biggest credential leaks of the last decade weren't from the app itself, they were from debug logs with the password field still in them. Forward-reference 9.2's 'secure by default' thesis - we'll revisit this then.</a:t>
-            </a:r>
-            <a:endParaRPr/>
+            <a:r>
+              <a:t>Log aggregators are databases and get breached. Revisited in 9.2.</a:t>
+            </a:r>
           </a:p>
         </p:txBody>
       </p:sp>
@@ -6668,66 +5714,9 @@
           </a:bodyPr>
           <a:lstStyle/>
           <a:p>
-            <a:pPr indent="0" lvl="0" marL="0" rtl="0" algn="l">
-              <a:spcBef>
-                <a:spcPts val="0"/>
-              </a:spcBef>
-              <a:spcAft>
-                <a:spcPts val="0"/>
-              </a:spcAft>
-              <a:buNone/>
-            </a:pPr>
-            <a:r>
-              <a:rPr lang="en-US"/>
-              <a:t>Land both theses together. 'Control' came out of the testing arc and 'observe' came out of the logging arc, and they're the same idea split across dev and prod. Pause on this one and let it click before moving to the wrap-up. If students leave with just this one framing they'll be in good shape for assignment 2 and for the final project deploy later in the term.</a:t>
-            </a:r>
-            <a:endParaRPr/>
-          </a:p>
-          <a:p>
-            <a:pPr indent="0" lvl="0" marL="0" rtl="0" algn="l">
-              <a:spcBef>
-                <a:spcPts val="0"/>
-              </a:spcBef>
-              <a:spcAft>
-                <a:spcPts val="0"/>
-              </a:spcAft>
-              <a:buNone/>
-            </a:pPr>
-            <a:r>
-              <a:t/>
-            </a:r>
-            <a:endParaRPr/>
-          </a:p>
-          <a:p>
-            <a:pPr indent="0" lvl="0" marL="0" rtl="0" algn="l">
-              <a:spcBef>
-                <a:spcPts val="0"/>
-              </a:spcBef>
-              <a:spcAft>
-                <a:spcPts val="0"/>
-              </a:spcAft>
-              <a:buNone/>
-            </a:pPr>
-            <a:r>
-              <a:rPr lang="en-US"/>
-              <a:t>A thorough test suite isn't gonna save you from a prod outage at 2am, and great logs aren't gonna save you from shipping a broken release in the first place, so skipping either one leaves you blind in one phase or the other.</a:t>
-            </a:r>
-            <a:endParaRPr/>
-          </a:p>
-          <a:p>
-            <a:pPr indent="0" lvl="0" marL="0" rtl="0" algn="l">
-              <a:spcBef>
-                <a:spcPts val="0"/>
-              </a:spcBef>
-              <a:spcAft>
-                <a:spcPts val="0"/>
-              </a:spcAft>
-              <a:buNone/>
-            </a:pPr>
-            <a:r>
-              <a:t/>
-            </a:r>
-            <a:endParaRPr/>
+            <a:r>
+              <a:t>Pause here before wrap-up.</a:t>
+            </a:r>
           </a:p>
         </p:txBody>
       </p:sp>
@@ -6865,66 +5854,9 @@
           </a:bodyPr>
           <a:lstStyle/>
           <a:p>
-            <a:pPr indent="0" lvl="0" marL="0" rtl="0" algn="l">
-              <a:spcBef>
-                <a:spcPts val="0"/>
-              </a:spcBef>
-              <a:spcAft>
-                <a:spcPts val="0"/>
-              </a:spcAft>
-              <a:buNone/>
-            </a:pPr>
-            <a:r>
-              <a:rPr lang="en-US"/>
-              <a:t>Land both theses together. 'Control' came out of the testing arc and 'observe' came out of the logging arc, and they're the same idea split across dev and prod. Pause on this one and let it click before moving to the wrap-up. If students leave with just this one framing they'll be in good shape for assignment 2 and for the final project deploy later in the term.</a:t>
-            </a:r>
-            <a:endParaRPr/>
-          </a:p>
-          <a:p>
-            <a:pPr indent="0" lvl="0" marL="0" rtl="0" algn="l">
-              <a:spcBef>
-                <a:spcPts val="0"/>
-              </a:spcBef>
-              <a:spcAft>
-                <a:spcPts val="0"/>
-              </a:spcAft>
-              <a:buNone/>
-            </a:pPr>
-            <a:r>
-              <a:t/>
-            </a:r>
-            <a:endParaRPr/>
-          </a:p>
-          <a:p>
-            <a:pPr indent="0" lvl="0" marL="0" rtl="0" algn="l">
-              <a:spcBef>
-                <a:spcPts val="0"/>
-              </a:spcBef>
-              <a:spcAft>
-                <a:spcPts val="0"/>
-              </a:spcAft>
-              <a:buNone/>
-            </a:pPr>
-            <a:r>
-              <a:rPr lang="en-US"/>
-              <a:t>A thorough test suite isn't gonna save you from a prod outage at 2am, and great logs aren't gonna save you from shipping a broken release in the first place, so skipping either one leaves you blind in one phase or the other.</a:t>
-            </a:r>
-            <a:endParaRPr/>
-          </a:p>
-          <a:p>
-            <a:pPr indent="0" lvl="0" marL="0" rtl="0" algn="l">
-              <a:spcBef>
-                <a:spcPts val="0"/>
-              </a:spcBef>
-              <a:spcAft>
-                <a:spcPts val="0"/>
-              </a:spcAft>
-              <a:buNone/>
-            </a:pPr>
-            <a:r>
-              <a:t/>
-            </a:r>
-            <a:endParaRPr/>
+            <a:r>
+              <a:t>Pause here before wrap-up.</a:t>
+            </a:r>
           </a:p>
         </p:txBody>
       </p:sp>
@@ -7062,20 +5994,9 @@
           </a:bodyPr>
           <a:lstStyle/>
           <a:p>
-            <a:pPr indent="0" lvl="0" marL="0" rtl="0" algn="l">
-              <a:spcBef>
-                <a:spcPts val="0"/>
-              </a:spcBef>
-              <a:spcAft>
-                <a:spcPts val="0"/>
-              </a:spcAft>
-              <a:buNone/>
-            </a:pPr>
-            <a:r>
-              <a:rPr lang="en-US"/>
-              <a:t>Recap both theses side by side and plant the forward-reference: assignment 2 requires tests, so they'll need today's material right away. Logging isn't on the A2 rubric, but it comes back when we deploy in week 7 and again in 9.2 when we talk security - worth saying that out loud so it doesn't feel like a one-off detour.</a:t>
-            </a:r>
-            <a:endParaRPr/>
+            <a:r>
+              <a:t>Logging isn't on the A2 rubric; returns in week 7 deploy and 9.2.</a:t>
+            </a:r>
           </a:p>
         </p:txBody>
       </p:sp>
@@ -7213,20 +6134,9 @@
           </a:bodyPr>
           <a:lstStyle/>
           <a:p>
-            <a:pPr indent="0" lvl="0" marL="0" rtl="0" algn="l">
-              <a:spcBef>
-                <a:spcPts val="0"/>
-              </a:spcBef>
-              <a:spcAft>
-                <a:spcPts val="0"/>
-              </a:spcAft>
-              <a:buNone/>
-            </a:pPr>
-            <a:r>
-              <a:rPr lang="en-US"/>
-              <a:t>Issues (1) SLOW - 2s sleep plus process startup per test, multiplied by every test in your suite. (2) FLAKY - if the server takes more than 2s to start, the test just fails for no real reason. (3) PORT CONFLICT - anything else on :8000 breaks it. (4) POLLUTES REAL DB - every run leaves a row in chat.db. (5) TESTS INTERFERE - run it twice, the second run sees     the first run's row. Not independent. (6) ORPHAN PROCESSES - if the test crashes before     finally, uvicorn never gets cleaned up. (7) BOILERPLATE - every test in the file needs the same     subprocess dance. Leave their list up on the board. Each tool in the next section kills one or more of the gripes.</a:t>
-            </a:r>
-            <a:endParaRPr/>
+            <a:r>
+              <a:t>Answers: slow, flaky, port conflict, pollutes chat.db, interfering tests, orphans, boilerplate. Keep on board.</a:t>
+            </a:r>
           </a:p>
         </p:txBody>
       </p:sp>
@@ -7364,79 +6274,9 @@
           </a:bodyPr>
           <a:lstStyle/>
           <a:p>
-            <a:pPr indent="0" lvl="0" marL="0" rtl="0" algn="l">
-              <a:spcBef>
-                <a:spcPts val="0"/>
-              </a:spcBef>
-              <a:spcAft>
-                <a:spcPts val="0"/>
-              </a:spcAft>
-              <a:buNone/>
-            </a:pPr>
-            <a:r>
-              <a:rPr lang="en-US"/>
-              <a:t>This test technically works, which is part of why it's so seductive - it spins up real uvicorn, hits the real endpoint, gets back the real response. Every dependency is real...which is exactly the problem. Read it out loud line by line before flipping to the discussion slide. Students should feel it's kinda janky by the time you hit `finally: proc.terminate()`.</a:t>
-            </a:r>
-            <a:endParaRPr/>
-          </a:p>
-          <a:p>
-            <a:pPr indent="0" lvl="0" marL="0" rtl="0" algn="l">
-              <a:spcBef>
-                <a:spcPts val="0"/>
-              </a:spcBef>
-              <a:spcAft>
-                <a:spcPts val="0"/>
-              </a:spcAft>
-              <a:buNone/>
-            </a:pPr>
-            <a:r>
-              <a:t/>
-            </a:r>
-            <a:endParaRPr/>
-          </a:p>
-          <a:p>
-            <a:pPr indent="0" lvl="0" marL="0" rtl="0" algn="l">
-              <a:spcBef>
-                <a:spcPts val="0"/>
-              </a:spcBef>
-              <a:spcAft>
-                <a:spcPts val="0"/>
-              </a:spcAft>
-              <a:buClr>
-                <a:schemeClr val="dk1"/>
-              </a:buClr>
-              <a:buSzPts val="1100"/>
-              <a:buFont typeface="Arial"/>
-              <a:buNone/>
-            </a:pPr>
-            <a:r>
-              <a:rPr lang="en-US">
-                <a:solidFill>
-                  <a:schemeClr val="dk1"/>
-                </a:solidFill>
-              </a:rPr>
-              <a:t>Issues (1) SLOW - 2s sleep plus process startup per test, multiplied by every test in your suite. (2) FLAKY - if the server takes more than 2s to start, the test just fails for no real reason. (3) PORT CONFLICT - anything else on :8000 breaks it. (4) POLLUTES REAL DB - every run leaves a row in chat.db. (5) TESTS INTERFERE - run it twice, the second run sees     the first run's row. Not independent. (6) ORPHAN PROCESSES - if the test crashes before     finally, uvicorn never gets cleaned up. (7) BOILERPLATE - every test in the file needs the same     subprocess dance. Leave their list up on the board. Each tool in the next section kills one or more of the gripes.</a:t>
-            </a:r>
-            <a:endParaRPr>
-              <a:solidFill>
-                <a:schemeClr val="dk1"/>
-              </a:solidFill>
-            </a:endParaRPr>
-          </a:p>
-          <a:p>
-            <a:pPr indent="0" lvl="0" marL="0" rtl="0" algn="l">
-              <a:spcBef>
-                <a:spcPts val="0"/>
-              </a:spcBef>
-              <a:spcAft>
-                <a:spcPts val="0"/>
-              </a:spcAft>
-              <a:buNone/>
-            </a:pPr>
-            <a:r>
-              <a:t/>
-            </a:r>
-            <a:endParaRPr/>
+            <a:r>
+              <a:t>Read aloud line by line before the discussion.</a:t>
+            </a:r>
           </a:p>
         </p:txBody>
       </p:sp>
@@ -7574,20 +6414,9 @@
           </a:bodyPr>
           <a:lstStyle/>
           <a:p>
-            <a:pPr indent="0" lvl="0" marL="0" rtl="0" algn="l">
-              <a:spcBef>
-                <a:spcPts val="0"/>
-              </a:spcBef>
-              <a:spcAft>
-                <a:spcPts val="0"/>
-              </a:spcAft>
-              <a:buNone/>
-            </a:pPr>
-            <a:r>
-              <a:rPr lang="en-US"/>
-              <a:t>Most of these came out of the last discussion. Go quickly; students have already internalized the first two. Spend the most time on deterministic and independent, which are newer to them and will come up in 4.2 when we talk about databases and fixtures.</a:t>
-            </a:r>
-            <a:endParaRPr/>
+            <a:r>
+              <a:t>Go fast; spend time on deterministic and independent.</a:t>
+            </a:r>
           </a:p>
         </p:txBody>
       </p:sp>
@@ -7725,20 +6554,9 @@
           </a:bodyPr>
           <a:lstStyle/>
           <a:p>
-            <a:pPr indent="0" lvl="0" marL="0" rtl="0" algn="l">
-              <a:spcBef>
-                <a:spcPts val="0"/>
-              </a:spcBef>
-              <a:spcAft>
-                <a:spcPts val="0"/>
-              </a:spcAft>
-              <a:buNone/>
-            </a:pPr>
-            <a:r>
-              <a:rPr lang="en-US"/>
-              <a:t>The toolkit. Every tool gets introduced as the fix for one of the gripes from the discussion board...so keep the board visible.</a:t>
-            </a:r>
-            <a:endParaRPr/>
+            <a:r>
+              <a:t>Keep the gripe board visible; each tool fixes one.</a:t>
+            </a:r>
           </a:p>
         </p:txBody>
       </p:sp>
@@ -7876,20 +6694,9 @@
           </a:bodyPr>
           <a:lstStyle/>
           <a:p>
-            <a:pPr indent="0" lvl="0" marL="0" rtl="0" algn="l">
-              <a:spcBef>
-                <a:spcPts val="0"/>
-              </a:spcBef>
-              <a:spcAft>
-                <a:spcPts val="0"/>
-              </a:spcAft>
-              <a:buNone/>
-            </a:pPr>
-            <a:r>
-              <a:rPr lang="en-US"/>
-              <a:t>TestClient wraps your app and exposes .get(), .post(), etc. that look exactly like the real requests library. Everything happens in-process, no real sockets involved. This one tool kills gripes 1, 2, 3, and 6 from the board in a single shot, which is really why it's the first thing we reach for.</a:t>
-            </a:r>
-            <a:endParaRPr/>
+            <a:r>
+              <a:t>Fixes gripes 1, 2, 3, 6 from the board.</a:t>
+            </a:r>
           </a:p>
         </p:txBody>
       </p:sp>

--- a/lectures/Lecture 4.2 - Practical Testing.pptx
+++ b/lectures/Lecture 4.2 - Practical Testing.pptx
@@ -4320,6 +4320,90 @@
           <a:p>
             <a:r>
               <a:t>Answers: [], author/text json, 201, "alice", "first!", 1, body["id"].</a:t>
+            </a:r>
+          </a:p>
+          <a:p/>
+          <a:p>
+            <a:r>
+              <a:t>def test_post_creates_new_message(client, test_db):</a:t>
+            </a:r>
+          </a:p>
+          <a:p>
+            <a:r>
+              <a:t>    # Arrange</a:t>
+            </a:r>
+          </a:p>
+          <a:p>
+            <a:r>
+              <a:t>    assert client.get("/api/messages").json() == []</a:t>
+            </a:r>
+          </a:p>
+          <a:p/>
+          <a:p>
+            <a:r>
+              <a:t>    # Act</a:t>
+            </a:r>
+          </a:p>
+          <a:p>
+            <a:r>
+              <a:t>    r = client.post("/api/messages",</a:t>
+            </a:r>
+          </a:p>
+          <a:p>
+            <a:r>
+              <a:t>                    json={"author": "alice", "text": "first!"})</a:t>
+            </a:r>
+          </a:p>
+          <a:p/>
+          <a:p>
+            <a:r>
+              <a:t>    # Assert: response</a:t>
+            </a:r>
+          </a:p>
+          <a:p>
+            <a:r>
+              <a:t>    assert r.status_code == 201</a:t>
+            </a:r>
+          </a:p>
+          <a:p>
+            <a:r>
+              <a:t>    body = r.json()</a:t>
+            </a:r>
+          </a:p>
+          <a:p>
+            <a:r>
+              <a:t>    assert body["author"] == "alice"</a:t>
+            </a:r>
+          </a:p>
+          <a:p>
+            <a:r>
+              <a:t>    assert body["text"] == "first!"</a:t>
+            </a:r>
+          </a:p>
+          <a:p>
+            <a:r>
+              <a:t>    assert "id" in body and "timestamp" in body</a:t>
+            </a:r>
+          </a:p>
+          <a:p/>
+          <a:p>
+            <a:r>
+              <a:t>    # Assert: persisted state</a:t>
+            </a:r>
+          </a:p>
+          <a:p>
+            <a:r>
+              <a:t>    all_msgs = client.get("/api/messages").json()</a:t>
+            </a:r>
+          </a:p>
+          <a:p>
+            <a:r>
+              <a:t>    assert len(all_msgs) == 1</a:t>
+            </a:r>
+          </a:p>
+          <a:p>
+            <a:r>
+              <a:t>    assert all_msgs[0]["id"] == body["id"]</a:t>
             </a:r>
           </a:p>
         </p:txBody>
